--- a/docs/Flight_Weather_Risk_Pipeline.pptx
+++ b/docs/Flight_Weather_Risk_Pipeline.pptx
@@ -19,7 +19,8 @@
     <p:sldId id="267" r:id="rId13"/>
     <p:sldId id="266" r:id="rId14"/>
     <p:sldId id="268" r:id="rId15"/>
-    <p:sldId id="269" r:id="rId16"/>
+    <p:sldId id="272" r:id="rId16"/>
+    <p:sldId id="269" r:id="rId17"/>
   </p:sldIdLst>
   <p:sldSz cx="12192000" cy="6858000"/>
   <p:notesSz cx="6858000" cy="9144000"/>
@@ -316,7 +317,7 @@
           <a:p>
             <a:fld id="{5BCAD085-E8A6-8845-BD4E-CB4CCA059FC4}" type="datetimeFigureOut">
               <a:rPr lang="en-US" smtClean="0"/>
-              <a:t>4/24/2026</a:t>
+              <a:t>4/26/2026</a:t>
             </a:fld>
             <a:endParaRPr lang="en-US"/>
           </a:p>
@@ -484,7 +485,7 @@
           <a:p>
             <a:fld id="{5BCAD085-E8A6-8845-BD4E-CB4CCA059FC4}" type="datetimeFigureOut">
               <a:rPr lang="en-US" smtClean="0"/>
-              <a:t>4/24/2026</a:t>
+              <a:t>4/26/2026</a:t>
             </a:fld>
             <a:endParaRPr lang="en-US"/>
           </a:p>
@@ -662,7 +663,7 @@
           <a:p>
             <a:fld id="{5BCAD085-E8A6-8845-BD4E-CB4CCA059FC4}" type="datetimeFigureOut">
               <a:rPr lang="en-US" smtClean="0"/>
-              <a:t>4/24/2026</a:t>
+              <a:t>4/26/2026</a:t>
             </a:fld>
             <a:endParaRPr lang="en-US"/>
           </a:p>
@@ -830,7 +831,7 @@
           <a:p>
             <a:fld id="{5BCAD085-E8A6-8845-BD4E-CB4CCA059FC4}" type="datetimeFigureOut">
               <a:rPr lang="en-US" smtClean="0"/>
-              <a:t>4/24/2026</a:t>
+              <a:t>4/26/2026</a:t>
             </a:fld>
             <a:endParaRPr lang="en-US"/>
           </a:p>
@@ -1075,7 +1076,7 @@
           <a:p>
             <a:fld id="{5BCAD085-E8A6-8845-BD4E-CB4CCA059FC4}" type="datetimeFigureOut">
               <a:rPr lang="en-US" smtClean="0"/>
-              <a:t>4/24/2026</a:t>
+              <a:t>4/26/2026</a:t>
             </a:fld>
             <a:endParaRPr lang="en-US"/>
           </a:p>
@@ -1360,7 +1361,7 @@
           <a:p>
             <a:fld id="{5BCAD085-E8A6-8845-BD4E-CB4CCA059FC4}" type="datetimeFigureOut">
               <a:rPr lang="en-US" smtClean="0"/>
-              <a:t>4/24/2026</a:t>
+              <a:t>4/26/2026</a:t>
             </a:fld>
             <a:endParaRPr lang="en-US"/>
           </a:p>
@@ -1779,7 +1780,7 @@
           <a:p>
             <a:fld id="{5BCAD085-E8A6-8845-BD4E-CB4CCA059FC4}" type="datetimeFigureOut">
               <a:rPr lang="en-US" smtClean="0"/>
-              <a:t>4/24/2026</a:t>
+              <a:t>4/26/2026</a:t>
             </a:fld>
             <a:endParaRPr lang="en-US"/>
           </a:p>
@@ -1896,7 +1897,7 @@
           <a:p>
             <a:fld id="{5BCAD085-E8A6-8845-BD4E-CB4CCA059FC4}" type="datetimeFigureOut">
               <a:rPr lang="en-US" smtClean="0"/>
-              <a:t>4/24/2026</a:t>
+              <a:t>4/26/2026</a:t>
             </a:fld>
             <a:endParaRPr lang="en-US"/>
           </a:p>
@@ -1991,7 +1992,7 @@
           <a:p>
             <a:fld id="{5BCAD085-E8A6-8845-BD4E-CB4CCA059FC4}" type="datetimeFigureOut">
               <a:rPr lang="en-US" smtClean="0"/>
-              <a:t>4/24/2026</a:t>
+              <a:t>4/26/2026</a:t>
             </a:fld>
             <a:endParaRPr lang="en-US"/>
           </a:p>
@@ -2266,7 +2267,7 @@
           <a:p>
             <a:fld id="{5BCAD085-E8A6-8845-BD4E-CB4CCA059FC4}" type="datetimeFigureOut">
               <a:rPr lang="en-US" smtClean="0"/>
-              <a:t>4/24/2026</a:t>
+              <a:t>4/26/2026</a:t>
             </a:fld>
             <a:endParaRPr lang="en-US"/>
           </a:p>
@@ -2518,7 +2519,7 @@
           <a:p>
             <a:fld id="{5BCAD085-E8A6-8845-BD4E-CB4CCA059FC4}" type="datetimeFigureOut">
               <a:rPr lang="en-US" smtClean="0"/>
-              <a:t>4/24/2026</a:t>
+              <a:t>4/26/2026</a:t>
             </a:fld>
             <a:endParaRPr lang="en-US"/>
           </a:p>
@@ -2729,7 +2730,7 @@
           <a:p>
             <a:fld id="{5BCAD085-E8A6-8845-BD4E-CB4CCA059FC4}" type="datetimeFigureOut">
               <a:rPr lang="en-US" smtClean="0"/>
-              <a:t>4/24/2026</a:t>
+              <a:t>4/26/2026</a:t>
             </a:fld>
             <a:endParaRPr lang="en-US"/>
           </a:p>
@@ -7946,7 +7947,7 @@
           <a:p>
             <a:pPr algn="l"/>
             <a:r>
-              <a:rPr sz="1500" b="0" i="0">
+              <a:rPr sz="1500" b="0" i="0" dirty="0">
                 <a:solidFill>
                   <a:srgbClr val="CBD5E1"/>
                 </a:solidFill>
@@ -8834,6 +8835,434 @@
 </file>
 
 <file path=ppt/slides/slide15.xml><?xml version="1.0" encoding="utf-8"?>
+<p:sld xmlns:a="http://schemas.openxmlformats.org/drawingml/2006/main" xmlns:r="http://schemas.openxmlformats.org/officeDocument/2006/relationships" xmlns:p="http://schemas.openxmlformats.org/presentationml/2006/main">
+  <p:cSld>
+    <p:spTree>
+      <p:nvGrpSpPr>
+        <p:cNvPr id="1" name="">
+          <a:extLst>
+            <a:ext uri="{FF2B5EF4-FFF2-40B4-BE49-F238E27FC236}">
+              <a16:creationId xmlns:a16="http://schemas.microsoft.com/office/drawing/2014/main" id="{C2C0A571-A2DA-4C5D-83DF-5FC79109E196}"/>
+            </a:ext>
+          </a:extLst>
+        </p:cNvPr>
+        <p:cNvGrpSpPr/>
+        <p:nvPr/>
+      </p:nvGrpSpPr>
+      <p:grpSpPr>
+        <a:xfrm>
+          <a:off x="0" y="0"/>
+          <a:ext cx="0" cy="0"/>
+          <a:chOff x="0" y="0"/>
+          <a:chExt cx="0" cy="0"/>
+        </a:xfrm>
+      </p:grpSpPr>
+      <p:sp>
+        <p:nvSpPr>
+          <p:cNvPr id="2" name="Rectangle 1">
+            <a:extLst>
+              <a:ext uri="{FF2B5EF4-FFF2-40B4-BE49-F238E27FC236}">
+                <a16:creationId xmlns:a16="http://schemas.microsoft.com/office/drawing/2014/main" id="{85B70217-8FC7-FF69-A73C-15F09BC06030}"/>
+              </a:ext>
+            </a:extLst>
+          </p:cNvPr>
+          <p:cNvSpPr/>
+          <p:nvPr/>
+        </p:nvSpPr>
+        <p:spPr>
+          <a:xfrm>
+            <a:off x="0" y="0"/>
+            <a:ext cx="12191695" cy="6858000"/>
+          </a:xfrm>
+          <a:prstGeom prst="rect">
+            <a:avLst/>
+          </a:prstGeom>
+          <a:solidFill>
+            <a:srgbClr val="0B1426"/>
+          </a:solidFill>
+          <a:ln>
+            <a:noFill/>
+          </a:ln>
+          <a:effectLst/>
+        </p:spPr>
+        <p:style>
+          <a:lnRef idx="1">
+            <a:schemeClr val="accent1"/>
+          </a:lnRef>
+          <a:fillRef idx="3">
+            <a:schemeClr val="accent1"/>
+          </a:fillRef>
+          <a:effectRef idx="2">
+            <a:schemeClr val="accent1"/>
+          </a:effectRef>
+          <a:fontRef idx="minor">
+            <a:schemeClr val="lt1"/>
+          </a:fontRef>
+        </p:style>
+        <p:txBody>
+          <a:bodyPr rtlCol="0" anchor="ctr"/>
+          <a:lstStyle/>
+          <a:p>
+            <a:pPr algn="ctr"/>
+            <a:endParaRPr/>
+          </a:p>
+        </p:txBody>
+      </p:sp>
+      <p:sp>
+        <p:nvSpPr>
+          <p:cNvPr id="3" name="Oval 2">
+            <a:extLst>
+              <a:ext uri="{FF2B5EF4-FFF2-40B4-BE49-F238E27FC236}">
+                <a16:creationId xmlns:a16="http://schemas.microsoft.com/office/drawing/2014/main" id="{6E84B482-BE98-2763-D17A-851ECAC9A7C5}"/>
+              </a:ext>
+            </a:extLst>
+          </p:cNvPr>
+          <p:cNvSpPr/>
+          <p:nvPr/>
+        </p:nvSpPr>
+        <p:spPr>
+          <a:xfrm>
+            <a:off x="777240" y="704088"/>
+            <a:ext cx="164592" cy="164592"/>
+          </a:xfrm>
+          <a:prstGeom prst="ellipse">
+            <a:avLst/>
+          </a:prstGeom>
+          <a:solidFill>
+            <a:srgbClr val="22C55E"/>
+          </a:solidFill>
+          <a:ln>
+            <a:noFill/>
+          </a:ln>
+          <a:effectLst/>
+        </p:spPr>
+        <p:style>
+          <a:lnRef idx="1">
+            <a:schemeClr val="accent1"/>
+          </a:lnRef>
+          <a:fillRef idx="3">
+            <a:schemeClr val="accent1"/>
+          </a:fillRef>
+          <a:effectRef idx="2">
+            <a:schemeClr val="accent1"/>
+          </a:effectRef>
+          <a:fontRef idx="minor">
+            <a:schemeClr val="lt1"/>
+          </a:fontRef>
+        </p:style>
+        <p:txBody>
+          <a:bodyPr rtlCol="0" anchor="ctr"/>
+          <a:lstStyle/>
+          <a:p>
+            <a:pPr algn="ctr"/>
+            <a:endParaRPr/>
+          </a:p>
+        </p:txBody>
+      </p:sp>
+      <p:sp>
+        <p:nvSpPr>
+          <p:cNvPr id="4" name="TextBox 3">
+            <a:extLst>
+              <a:ext uri="{FF2B5EF4-FFF2-40B4-BE49-F238E27FC236}">
+                <a16:creationId xmlns:a16="http://schemas.microsoft.com/office/drawing/2014/main" id="{25F85402-0417-9A05-AEB0-8CEFA93D5E11}"/>
+              </a:ext>
+            </a:extLst>
+          </p:cNvPr>
+          <p:cNvSpPr txBox="1"/>
+          <p:nvPr/>
+        </p:nvSpPr>
+        <p:spPr>
+          <a:xfrm>
+            <a:off x="1051560" y="647884"/>
+            <a:ext cx="4114800" cy="276999"/>
+          </a:xfrm>
+          <a:prstGeom prst="rect">
+            <a:avLst/>
+          </a:prstGeom>
+          <a:noFill/>
+        </p:spPr>
+        <p:txBody>
+          <a:bodyPr wrap="square" lIns="45720" rIns="45720" anchor="ctr">
+            <a:spAutoFit/>
+          </a:bodyPr>
+          <a:lstStyle/>
+          <a:p>
+            <a:pPr algn="l"/>
+            <a:r>
+              <a:rPr lang="en-US" sz="1200" b="1" i="0" dirty="0">
+                <a:solidFill>
+                  <a:srgbClr val="22C55E"/>
+                </a:solidFill>
+                <a:latin typeface="Calibri"/>
+              </a:rPr>
+              <a:t>PROJECT ARCHITECTURE</a:t>
+            </a:r>
+            <a:endParaRPr sz="1200" b="1" i="0" dirty="0">
+              <a:solidFill>
+                <a:srgbClr val="22C55E"/>
+              </a:solidFill>
+              <a:latin typeface="Calibri"/>
+            </a:endParaRPr>
+          </a:p>
+        </p:txBody>
+      </p:sp>
+      <p:sp>
+        <p:nvSpPr>
+          <p:cNvPr id="5" name="TextBox 4">
+            <a:extLst>
+              <a:ext uri="{FF2B5EF4-FFF2-40B4-BE49-F238E27FC236}">
+                <a16:creationId xmlns:a16="http://schemas.microsoft.com/office/drawing/2014/main" id="{6817D73A-D9D0-1A64-068B-2E2AF30F065D}"/>
+              </a:ext>
+            </a:extLst>
+          </p:cNvPr>
+          <p:cNvSpPr txBox="1"/>
+          <p:nvPr/>
+        </p:nvSpPr>
+        <p:spPr>
+          <a:xfrm>
+            <a:off x="777240" y="1051560"/>
+            <a:ext cx="10515600" cy="707886"/>
+          </a:xfrm>
+          <a:prstGeom prst="rect">
+            <a:avLst/>
+          </a:prstGeom>
+          <a:noFill/>
+        </p:spPr>
+        <p:txBody>
+          <a:bodyPr wrap="square" lIns="45720" rIns="45720" anchor="t">
+            <a:spAutoFit/>
+          </a:bodyPr>
+          <a:lstStyle/>
+          <a:p>
+            <a:pPr algn="l"/>
+            <a:r>
+              <a:rPr lang="en-US" sz="4000" b="1" i="0" dirty="0">
+                <a:solidFill>
+                  <a:srgbClr val="F1F5F9"/>
+                </a:solidFill>
+                <a:latin typeface="Calibri"/>
+              </a:rPr>
+              <a:t>Project Architecture</a:t>
+            </a:r>
+            <a:endParaRPr sz="4000" b="1" i="0" dirty="0">
+              <a:solidFill>
+                <a:srgbClr val="F1F5F9"/>
+              </a:solidFill>
+              <a:latin typeface="Calibri"/>
+            </a:endParaRPr>
+          </a:p>
+        </p:txBody>
+      </p:sp>
+      <p:sp>
+        <p:nvSpPr>
+          <p:cNvPr id="27" name="Rectangle 26">
+            <a:extLst>
+              <a:ext uri="{FF2B5EF4-FFF2-40B4-BE49-F238E27FC236}">
+                <a16:creationId xmlns:a16="http://schemas.microsoft.com/office/drawing/2014/main" id="{43ED9E02-CD35-F093-1DEE-2A9787B17CA0}"/>
+              </a:ext>
+            </a:extLst>
+          </p:cNvPr>
+          <p:cNvSpPr/>
+          <p:nvPr/>
+        </p:nvSpPr>
+        <p:spPr>
+          <a:xfrm>
+            <a:off x="0" y="6766560"/>
+            <a:ext cx="12191695" cy="91440"/>
+          </a:xfrm>
+          <a:prstGeom prst="rect">
+            <a:avLst/>
+          </a:prstGeom>
+          <a:solidFill>
+            <a:srgbClr val="22C55E"/>
+          </a:solidFill>
+          <a:ln>
+            <a:noFill/>
+          </a:ln>
+          <a:effectLst/>
+        </p:spPr>
+        <p:style>
+          <a:lnRef idx="1">
+            <a:schemeClr val="accent1"/>
+          </a:lnRef>
+          <a:fillRef idx="3">
+            <a:schemeClr val="accent1"/>
+          </a:fillRef>
+          <a:effectRef idx="2">
+            <a:schemeClr val="accent1"/>
+          </a:effectRef>
+          <a:fontRef idx="minor">
+            <a:schemeClr val="lt1"/>
+          </a:fontRef>
+        </p:style>
+        <p:txBody>
+          <a:bodyPr rtlCol="0" anchor="ctr"/>
+          <a:lstStyle/>
+          <a:p>
+            <a:pPr algn="ctr"/>
+            <a:endParaRPr/>
+          </a:p>
+        </p:txBody>
+      </p:sp>
+      <p:sp>
+        <p:nvSpPr>
+          <p:cNvPr id="28" name="TextBox 27">
+            <a:extLst>
+              <a:ext uri="{FF2B5EF4-FFF2-40B4-BE49-F238E27FC236}">
+                <a16:creationId xmlns:a16="http://schemas.microsoft.com/office/drawing/2014/main" id="{8886FF38-AE50-60FD-169D-AC6F9D0DD7FF}"/>
+              </a:ext>
+            </a:extLst>
+          </p:cNvPr>
+          <p:cNvSpPr txBox="1"/>
+          <p:nvPr/>
+        </p:nvSpPr>
+        <p:spPr>
+          <a:xfrm>
+            <a:off x="11430000" y="6492240"/>
+            <a:ext cx="731520" cy="274320"/>
+          </a:xfrm>
+          <a:prstGeom prst="rect">
+            <a:avLst/>
+          </a:prstGeom>
+          <a:noFill/>
+        </p:spPr>
+        <p:txBody>
+          <a:bodyPr wrap="square" lIns="45720" rIns="45720" anchor="ctr">
+            <a:spAutoFit/>
+          </a:bodyPr>
+          <a:lstStyle/>
+          <a:p>
+            <a:pPr algn="r"/>
+            <a:r>
+              <a:rPr sz="1000" b="0" i="0">
+                <a:solidFill>
+                  <a:srgbClr val="94A3B8"/>
+                </a:solidFill>
+                <a:latin typeface="Calibri"/>
+              </a:rPr>
+              <a:t>13 / 14</a:t>
+            </a:r>
+          </a:p>
+        </p:txBody>
+      </p:sp>
+      <p:pic>
+        <p:nvPicPr>
+          <p:cNvPr id="30" name="Picture 29">
+            <a:extLst>
+              <a:ext uri="{FF2B5EF4-FFF2-40B4-BE49-F238E27FC236}">
+                <a16:creationId xmlns:a16="http://schemas.microsoft.com/office/drawing/2014/main" id="{E487BBF5-2C53-AE55-9726-AF87768355AF}"/>
+              </a:ext>
+            </a:extLst>
+          </p:cNvPr>
+          <p:cNvPicPr>
+            <a:picLocks noChangeAspect="1"/>
+          </p:cNvPicPr>
+          <p:nvPr/>
+        </p:nvPicPr>
+        <p:blipFill>
+          <a:blip r:embed="rId2"/>
+          <a:stretch>
+            <a:fillRect/>
+          </a:stretch>
+        </p:blipFill>
+        <p:spPr>
+          <a:xfrm>
+            <a:off x="2753867" y="1838380"/>
+            <a:ext cx="6684265" cy="4740751"/>
+          </a:xfrm>
+          <a:prstGeom prst="rect">
+            <a:avLst/>
+          </a:prstGeom>
+        </p:spPr>
+      </p:pic>
+      <p:sp>
+        <p:nvSpPr>
+          <p:cNvPr id="31" name="TextBox 30">
+            <a:extLst>
+              <a:ext uri="{FF2B5EF4-FFF2-40B4-BE49-F238E27FC236}">
+                <a16:creationId xmlns:a16="http://schemas.microsoft.com/office/drawing/2014/main" id="{5E0BD3A1-11CE-BC77-5A5C-A054AB6D5113}"/>
+              </a:ext>
+            </a:extLst>
+          </p:cNvPr>
+          <p:cNvSpPr txBox="1"/>
+          <p:nvPr/>
+        </p:nvSpPr>
+        <p:spPr>
+          <a:xfrm>
+            <a:off x="9438132" y="5840782"/>
+            <a:ext cx="2036190" cy="784830"/>
+          </a:xfrm>
+          <a:prstGeom prst="rect">
+            <a:avLst/>
+          </a:prstGeom>
+          <a:noFill/>
+        </p:spPr>
+        <p:txBody>
+          <a:bodyPr wrap="square" lIns="45720" rIns="45720" anchor="t">
+            <a:spAutoFit/>
+          </a:bodyPr>
+          <a:lstStyle/>
+          <a:p>
+            <a:pPr algn="l"/>
+            <a:r>
+              <a:rPr lang="en-US" sz="1500" b="0" i="0" dirty="0">
+                <a:solidFill>
+                  <a:srgbClr val="CBD5E1"/>
+                </a:solidFill>
+                <a:latin typeface="Calibri"/>
+              </a:rPr>
+              <a:t>*** Power BI desktop is also </a:t>
+            </a:r>
+            <a:r>
+              <a:rPr lang="en-US" sz="1500" dirty="0">
+                <a:solidFill>
+                  <a:srgbClr val="CBD5E1"/>
+                </a:solidFill>
+                <a:latin typeface="Calibri"/>
+              </a:rPr>
+              <a:t>pulling data from Postgres and not </a:t>
+            </a:r>
+            <a:r>
+              <a:rPr lang="en-US" sz="1500" dirty="0" err="1">
+                <a:solidFill>
+                  <a:srgbClr val="CBD5E1"/>
+                </a:solidFill>
+                <a:latin typeface="Calibri"/>
+              </a:rPr>
+              <a:t>MinIO</a:t>
+            </a:r>
+            <a:r>
+              <a:rPr lang="en-US" sz="1500" dirty="0">
+                <a:solidFill>
+                  <a:srgbClr val="CBD5E1"/>
+                </a:solidFill>
+                <a:latin typeface="Calibri"/>
+              </a:rPr>
+              <a:t>.</a:t>
+            </a:r>
+            <a:endParaRPr sz="1500" b="0" i="0" dirty="0">
+              <a:solidFill>
+                <a:srgbClr val="CBD5E1"/>
+              </a:solidFill>
+              <a:latin typeface="Calibri"/>
+            </a:endParaRPr>
+          </a:p>
+        </p:txBody>
+      </p:sp>
+    </p:spTree>
+    <p:extLst>
+      <p:ext uri="{BB962C8B-B14F-4D97-AF65-F5344CB8AC3E}">
+        <p14:creationId xmlns:p14="http://schemas.microsoft.com/office/powerpoint/2010/main" val="1317285510"/>
+      </p:ext>
+    </p:extLst>
+  </p:cSld>
+  <p:clrMapOvr>
+    <a:masterClrMapping/>
+  </p:clrMapOvr>
+</p:sld>
+</file>
+
+<file path=ppt/slides/slide16.xml><?xml version="1.0" encoding="utf-8"?>
 <p:sld xmlns:a="http://schemas.openxmlformats.org/drawingml/2006/main" xmlns:r="http://schemas.openxmlformats.org/officeDocument/2006/relationships" xmlns:p="http://schemas.openxmlformats.org/presentationml/2006/main">
   <p:cSld>
     <p:spTree>
